--- a/智能对话伙伴_创新版式.pptx
+++ b/智能对话伙伴_创新版式.pptx
@@ -3608,8 +3608,8 @@
         </p:nvSpPr>
         <p:spPr>
           <a:xfrm>
-            <a:off x="2468880" y="1554480"/>
-            <a:ext cx="7223760" cy="457200"/>
+            <a:off x="2468880" y="1600200"/>
+            <a:ext cx="7223760" cy="548640"/>
           </a:xfrm>
           <a:prstGeom prst="rect">
             <a:avLst/>
@@ -3623,7 +3623,7 @@
           <a:lstStyle/>
           <a:p>
             <a:pPr>
-              <a:defRPr sz="2200" b="1">
+              <a:defRPr sz="2400" b="1">
                 <a:solidFill>
                   <a:srgbClr val="FF9650"/>
                 </a:solidFill>
@@ -3643,8 +3643,8 @@
         </p:nvSpPr>
         <p:spPr>
           <a:xfrm>
-            <a:off x="2743200" y="2057400"/>
-            <a:ext cx="6675120" cy="457200"/>
+            <a:off x="2743200" y="2148840"/>
+            <a:ext cx="6675120" cy="548640"/>
           </a:xfrm>
           <a:prstGeom prst="rect">
             <a:avLst/>
@@ -3658,7 +3658,7 @@
           <a:lstStyle/>
           <a:p>
             <a:pPr>
-              <a:defRPr sz="1600">
+              <a:defRPr sz="1800">
                 <a:solidFill>
                   <a:srgbClr val="787878"/>
                 </a:solidFill>
@@ -3721,8 +3721,8 @@
         </p:nvSpPr>
         <p:spPr>
           <a:xfrm>
-            <a:off x="2468880" y="2926080"/>
-            <a:ext cx="7223760" cy="457200"/>
+            <a:off x="2468880" y="2971800"/>
+            <a:ext cx="7223760" cy="548640"/>
           </a:xfrm>
           <a:prstGeom prst="rect">
             <a:avLst/>
@@ -3736,7 +3736,7 @@
           <a:lstStyle/>
           <a:p>
             <a:pPr>
-              <a:defRPr sz="2200" b="1">
+              <a:defRPr sz="2400" b="1">
                 <a:solidFill>
                   <a:srgbClr val="5078B4"/>
                 </a:solidFill>
@@ -3756,8 +3756,8 @@
         </p:nvSpPr>
         <p:spPr>
           <a:xfrm>
-            <a:off x="2743200" y="3429000"/>
-            <a:ext cx="6675120" cy="457200"/>
+            <a:off x="2743200" y="3520440"/>
+            <a:ext cx="6675120" cy="548640"/>
           </a:xfrm>
           <a:prstGeom prst="rect">
             <a:avLst/>
@@ -3771,7 +3771,7 @@
           <a:lstStyle/>
           <a:p>
             <a:pPr>
-              <a:defRPr sz="1600">
+              <a:defRPr sz="1800">
                 <a:solidFill>
                   <a:srgbClr val="787878"/>
                 </a:solidFill>
@@ -3834,8 +3834,8 @@
         </p:nvSpPr>
         <p:spPr>
           <a:xfrm>
-            <a:off x="2468880" y="4297680"/>
-            <a:ext cx="7223760" cy="457200"/>
+            <a:off x="2468880" y="4343400"/>
+            <a:ext cx="7223760" cy="548640"/>
           </a:xfrm>
           <a:prstGeom prst="rect">
             <a:avLst/>
@@ -3849,7 +3849,7 @@
           <a:lstStyle/>
           <a:p>
             <a:pPr>
-              <a:defRPr sz="2200" b="1">
+              <a:defRPr sz="2400" b="1">
                 <a:solidFill>
                   <a:srgbClr val="64A078"/>
                 </a:solidFill>
@@ -3869,8 +3869,8 @@
         </p:nvSpPr>
         <p:spPr>
           <a:xfrm>
-            <a:off x="2743200" y="4800600"/>
-            <a:ext cx="6675120" cy="457200"/>
+            <a:off x="2743200" y="4892040"/>
+            <a:ext cx="6675120" cy="548640"/>
           </a:xfrm>
           <a:prstGeom prst="rect">
             <a:avLst/>
@@ -3884,7 +3884,7 @@
           <a:lstStyle/>
           <a:p>
             <a:pPr>
-              <a:defRPr sz="1600">
+              <a:defRPr sz="1800">
                 <a:solidFill>
                   <a:srgbClr val="787878"/>
                 </a:solidFill>
@@ -4509,7 +4509,7 @@
           <a:lstStyle/>
           <a:p>
             <a:pPr algn="ctr">
-              <a:defRPr sz="1800">
+              <a:defRPr sz="2000">
                 <a:solidFill>
                   <a:srgbClr val="505050"/>
                 </a:solidFill>
@@ -4634,7 +4634,7 @@
           <a:lstStyle/>
           <a:p>
             <a:pPr algn="ctr">
-              <a:defRPr sz="1800">
+              <a:defRPr sz="2000">
                 <a:solidFill>
                   <a:srgbClr val="505050"/>
                 </a:solidFill>
@@ -4912,16 +4912,16 @@
       </p:sp>
       <p:sp>
         <p:nvSpPr>
-          <p:cNvPr id="6" name="Oval 5"/>
+          <p:cNvPr id="6" name="Rounded Rectangle 5"/>
           <p:cNvSpPr/>
           <p:nvPr/>
         </p:nvSpPr>
         <p:spPr>
           <a:xfrm>
-            <a:off x="777240" y="1463040"/>
-            <a:ext cx="3474720" cy="1828800"/>
-          </a:xfrm>
-          <a:prstGeom prst="ellipse">
+            <a:off x="731520" y="1463040"/>
+            <a:ext cx="2560320" cy="4114800"/>
+          </a:xfrm>
+          <a:prstGeom prst="roundRect">
             <a:avLst/>
           </a:prstGeom>
           <a:solidFill>
@@ -4961,8 +4961,8 @@
         </p:nvSpPr>
         <p:spPr>
           <a:xfrm>
-            <a:off x="2194560" y="1645920"/>
-            <a:ext cx="914400" cy="731520"/>
+            <a:off x="731520" y="1737360"/>
+            <a:ext cx="2560320" cy="914400"/>
           </a:xfrm>
           <a:prstGeom prst="rect">
             <a:avLst/>
@@ -4976,7 +4976,7 @@
           <a:lstStyle/>
           <a:p>
             <a:pPr algn="ctr">
-              <a:defRPr sz="4000"/>
+              <a:defRPr sz="4400"/>
             </a:pPr>
             <a:r>
               <a:t>🎪</a:t>
@@ -4992,8 +4992,8 @@
         </p:nvSpPr>
         <p:spPr>
           <a:xfrm>
-            <a:off x="914400" y="2560320"/>
-            <a:ext cx="3200400" cy="548640"/>
+            <a:off x="731520" y="2834640"/>
+            <a:ext cx="2560320" cy="640080"/>
           </a:xfrm>
           <a:prstGeom prst="rect">
             <a:avLst/>
@@ -5007,7 +5007,7 @@
           <a:lstStyle/>
           <a:p>
             <a:pPr algn="ctr">
-              <a:defRPr sz="2000" b="1">
+              <a:defRPr sz="2200" b="1">
                 <a:solidFill>
                   <a:srgbClr val="FF9650"/>
                 </a:solidFill>
@@ -5027,8 +5027,8 @@
         </p:nvSpPr>
         <p:spPr>
           <a:xfrm>
-            <a:off x="822960" y="3200400"/>
-            <a:ext cx="3383280" cy="1371600"/>
+            <a:off x="822960" y="3657600"/>
+            <a:ext cx="2377440" cy="1828800"/>
           </a:xfrm>
           <a:prstGeom prst="rect">
             <a:avLst/>
@@ -5042,7 +5042,7 @@
           <a:lstStyle/>
           <a:p>
             <a:pPr algn="ctr">
-              <a:defRPr sz="1500">
+              <a:defRPr sz="1600">
                 <a:solidFill>
                   <a:srgbClr val="505050"/>
                 </a:solidFill>
@@ -5056,16 +5056,16 @@
       </p:sp>
       <p:sp>
         <p:nvSpPr>
-          <p:cNvPr id="10" name="Oval 9"/>
+          <p:cNvPr id="10" name="Rounded Rectangle 9"/>
           <p:cNvSpPr/>
           <p:nvPr/>
         </p:nvSpPr>
         <p:spPr>
           <a:xfrm>
-            <a:off x="4434840" y="1463040"/>
-            <a:ext cx="3474720" cy="1828800"/>
-          </a:xfrm>
-          <a:prstGeom prst="ellipse">
+            <a:off x="3520440" y="1463040"/>
+            <a:ext cx="2560320" cy="4114800"/>
+          </a:xfrm>
+          <a:prstGeom prst="roundRect">
             <a:avLst/>
           </a:prstGeom>
           <a:solidFill>
@@ -5105,8 +5105,8 @@
         </p:nvSpPr>
         <p:spPr>
           <a:xfrm>
-            <a:off x="5852160" y="1645920"/>
-            <a:ext cx="914400" cy="731520"/>
+            <a:off x="3520440" y="1737360"/>
+            <a:ext cx="2560320" cy="914400"/>
           </a:xfrm>
           <a:prstGeom prst="rect">
             <a:avLst/>
@@ -5120,7 +5120,7 @@
           <a:lstStyle/>
           <a:p>
             <a:pPr algn="ctr">
-              <a:defRPr sz="4000"/>
+              <a:defRPr sz="4400"/>
             </a:pPr>
             <a:r>
               <a:t>⭐</a:t>
@@ -5136,8 +5136,8 @@
         </p:nvSpPr>
         <p:spPr>
           <a:xfrm>
-            <a:off x="4572000" y="2560320"/>
-            <a:ext cx="3200400" cy="548640"/>
+            <a:off x="3520440" y="2834640"/>
+            <a:ext cx="2560320" cy="640080"/>
           </a:xfrm>
           <a:prstGeom prst="rect">
             <a:avLst/>
@@ -5151,7 +5151,7 @@
           <a:lstStyle/>
           <a:p>
             <a:pPr algn="ctr">
-              <a:defRPr sz="2000" b="1">
+              <a:defRPr sz="2200" b="1">
                 <a:solidFill>
                   <a:srgbClr val="FF9650"/>
                 </a:solidFill>
@@ -5171,8 +5171,8 @@
         </p:nvSpPr>
         <p:spPr>
           <a:xfrm>
-            <a:off x="4480560" y="3200400"/>
-            <a:ext cx="3383280" cy="1371600"/>
+            <a:off x="3611880" y="3657600"/>
+            <a:ext cx="2377440" cy="1828800"/>
           </a:xfrm>
           <a:prstGeom prst="rect">
             <a:avLst/>
@@ -5186,7 +5186,7 @@
           <a:lstStyle/>
           <a:p>
             <a:pPr algn="ctr">
-              <a:defRPr sz="1500">
+              <a:defRPr sz="1600">
                 <a:solidFill>
                   <a:srgbClr val="505050"/>
                 </a:solidFill>
@@ -5200,16 +5200,16 @@
       </p:sp>
       <p:sp>
         <p:nvSpPr>
-          <p:cNvPr id="14" name="Oval 13"/>
+          <p:cNvPr id="14" name="Rounded Rectangle 13"/>
           <p:cNvSpPr/>
           <p:nvPr/>
         </p:nvSpPr>
         <p:spPr>
           <a:xfrm>
-            <a:off x="8092440" y="1463040"/>
-            <a:ext cx="3474720" cy="1828800"/>
-          </a:xfrm>
-          <a:prstGeom prst="ellipse">
+            <a:off x="6309360" y="1463040"/>
+            <a:ext cx="2560320" cy="4114800"/>
+          </a:xfrm>
+          <a:prstGeom prst="roundRect">
             <a:avLst/>
           </a:prstGeom>
           <a:solidFill>
@@ -5249,8 +5249,8 @@
         </p:nvSpPr>
         <p:spPr>
           <a:xfrm>
-            <a:off x="9509760" y="1645920"/>
-            <a:ext cx="914400" cy="731520"/>
+            <a:off x="6309360" y="1737360"/>
+            <a:ext cx="2560320" cy="914400"/>
           </a:xfrm>
           <a:prstGeom prst="rect">
             <a:avLst/>
@@ -5264,7 +5264,7 @@
           <a:lstStyle/>
           <a:p>
             <a:pPr algn="ctr">
-              <a:defRPr sz="4000"/>
+              <a:defRPr sz="4400"/>
             </a:pPr>
             <a:r>
               <a:t>🎯</a:t>
@@ -5280,8 +5280,8 @@
         </p:nvSpPr>
         <p:spPr>
           <a:xfrm>
-            <a:off x="8229600" y="2560320"/>
-            <a:ext cx="3200400" cy="548640"/>
+            <a:off x="6309360" y="2834640"/>
+            <a:ext cx="2560320" cy="640080"/>
           </a:xfrm>
           <a:prstGeom prst="rect">
             <a:avLst/>
@@ -5295,7 +5295,7 @@
           <a:lstStyle/>
           <a:p>
             <a:pPr algn="ctr">
-              <a:defRPr sz="2000" b="1">
+              <a:defRPr sz="2200" b="1">
                 <a:solidFill>
                   <a:srgbClr val="FF9650"/>
                 </a:solidFill>
@@ -5315,8 +5315,8 @@
         </p:nvSpPr>
         <p:spPr>
           <a:xfrm>
-            <a:off x="8138160" y="3200400"/>
-            <a:ext cx="3383280" cy="1371600"/>
+            <a:off x="6400800" y="3657600"/>
+            <a:ext cx="2377440" cy="1828800"/>
           </a:xfrm>
           <a:prstGeom prst="rect">
             <a:avLst/>
@@ -5330,7 +5330,7 @@
           <a:lstStyle/>
           <a:p>
             <a:pPr algn="ctr">
-              <a:defRPr sz="1500">
+              <a:defRPr sz="1600">
                 <a:solidFill>
                   <a:srgbClr val="505050"/>
                 </a:solidFill>
@@ -5344,14 +5344,158 @@
       </p:sp>
       <p:sp>
         <p:nvSpPr>
-          <p:cNvPr id="18" name="TextBox 17"/>
+          <p:cNvPr id="18" name="Rounded Rectangle 17"/>
+          <p:cNvSpPr/>
+          <p:nvPr/>
+        </p:nvSpPr>
+        <p:spPr>
+          <a:xfrm>
+            <a:off x="9098280" y="1463040"/>
+            <a:ext cx="2560320" cy="4114800"/>
+          </a:xfrm>
+          <a:prstGeom prst="roundRect">
+            <a:avLst/>
+          </a:prstGeom>
+          <a:solidFill>
+            <a:srgbClr val="FFFFFF"/>
+          </a:solidFill>
+          <a:ln>
+            <a:noFill/>
+          </a:ln>
+        </p:spPr>
+        <p:style>
+          <a:lnRef idx="1">
+            <a:schemeClr val="accent1"/>
+          </a:lnRef>
+          <a:fillRef idx="3">
+            <a:schemeClr val="accent1"/>
+          </a:fillRef>
+          <a:effectRef idx="2">
+            <a:schemeClr val="accent1"/>
+          </a:effectRef>
+          <a:fontRef idx="minor">
+            <a:schemeClr val="lt1"/>
+          </a:fontRef>
+        </p:style>
+        <p:txBody>
+          <a:bodyPr rtlCol="0" anchor="ctr"/>
+          <a:lstStyle/>
+          <a:p>
+            <a:pPr algn="ctr"/>
+          </a:p>
+        </p:txBody>
+      </p:sp>
+      <p:sp>
+        <p:nvSpPr>
+          <p:cNvPr id="19" name="TextBox 18"/>
           <p:cNvSpPr txBox="1"/>
           <p:nvPr/>
         </p:nvSpPr>
         <p:spPr>
           <a:xfrm>
-            <a:off x="1828800" y="5212080"/>
-            <a:ext cx="8503920" cy="914400"/>
+            <a:off x="9098280" y="1737360"/>
+            <a:ext cx="2560320" cy="914400"/>
+          </a:xfrm>
+          <a:prstGeom prst="rect">
+            <a:avLst/>
+          </a:prstGeom>
+          <a:noFill/>
+        </p:spPr>
+        <p:txBody>
+          <a:bodyPr wrap="none">
+            <a:spAutoFit/>
+          </a:bodyPr>
+          <a:lstStyle/>
+          <a:p>
+            <a:pPr algn="ctr">
+              <a:defRPr sz="4400"/>
+            </a:pPr>
+            <a:r>
+              <a:t>📊</a:t>
+            </a:r>
+          </a:p>
+        </p:txBody>
+      </p:sp>
+      <p:sp>
+        <p:nvSpPr>
+          <p:cNvPr id="20" name="TextBox 19"/>
+          <p:cNvSpPr txBox="1"/>
+          <p:nvPr/>
+        </p:nvSpPr>
+        <p:spPr>
+          <a:xfrm>
+            <a:off x="9098280" y="2834640"/>
+            <a:ext cx="2560320" cy="640080"/>
+          </a:xfrm>
+          <a:prstGeom prst="rect">
+            <a:avLst/>
+          </a:prstGeom>
+          <a:noFill/>
+        </p:spPr>
+        <p:txBody>
+          <a:bodyPr wrap="none">
+            <a:spAutoFit/>
+          </a:bodyPr>
+          <a:lstStyle/>
+          <a:p>
+            <a:pPr algn="ctr">
+              <a:defRPr sz="2200" b="1">
+                <a:solidFill>
+                  <a:srgbClr val="FF9650"/>
+                </a:solidFill>
+              </a:defRPr>
+            </a:pPr>
+            <a:r>
+              <a:t>成长报告</a:t>
+            </a:r>
+          </a:p>
+        </p:txBody>
+      </p:sp>
+      <p:sp>
+        <p:nvSpPr>
+          <p:cNvPr id="21" name="TextBox 20"/>
+          <p:cNvSpPr txBox="1"/>
+          <p:nvPr/>
+        </p:nvSpPr>
+        <p:spPr>
+          <a:xfrm>
+            <a:off x="9189720" y="3657600"/>
+            <a:ext cx="2377440" cy="1828800"/>
+          </a:xfrm>
+          <a:prstGeom prst="rect">
+            <a:avLst/>
+          </a:prstGeom>
+          <a:noFill/>
+        </p:spPr>
+        <p:txBody>
+          <a:bodyPr wrap="none">
+            <a:spAutoFit/>
+          </a:bodyPr>
+          <a:lstStyle/>
+          <a:p>
+            <a:pPr algn="ctr">
+              <a:defRPr sz="1600">
+                <a:solidFill>
+                  <a:srgbClr val="505050"/>
+                </a:solidFill>
+              </a:defRPr>
+            </a:pPr>
+            <a:r>
+              <a:t>详细记录进步曲线，家长更安心</a:t>
+            </a:r>
+          </a:p>
+        </p:txBody>
+      </p:sp>
+      <p:sp>
+        <p:nvSpPr>
+          <p:cNvPr id="22" name="TextBox 21"/>
+          <p:cNvSpPr txBox="1"/>
+          <p:nvPr/>
+        </p:nvSpPr>
+        <p:spPr>
+          <a:xfrm>
+            <a:off x="1828800" y="5760720"/>
+            <a:ext cx="8503920" cy="731520"/>
           </a:xfrm>
           <a:prstGeom prst="rect">
             <a:avLst/>
@@ -5610,8 +5754,8 @@
         </p:nvSpPr>
         <p:spPr>
           <a:xfrm>
-            <a:off x="1371600" y="1783080"/>
-            <a:ext cx="6675120" cy="457200"/>
+            <a:off x="1371600" y="1828800"/>
+            <a:ext cx="6675120" cy="548640"/>
           </a:xfrm>
           <a:prstGeom prst="rect">
             <a:avLst/>
@@ -5625,7 +5769,7 @@
           <a:lstStyle/>
           <a:p>
             <a:pPr>
-              <a:defRPr sz="2200" b="1">
+              <a:defRPr sz="2400" b="1">
                 <a:solidFill>
                   <a:srgbClr val="FF9650"/>
                 </a:solidFill>
@@ -5645,7 +5789,7 @@
         </p:nvSpPr>
         <p:spPr>
           <a:xfrm>
-            <a:off x="1554480" y="2286000"/>
+            <a:off x="1554480" y="2377440"/>
             <a:ext cx="6309360" cy="731520"/>
           </a:xfrm>
           <a:prstGeom prst="rect">
@@ -5660,7 +5804,7 @@
           <a:lstStyle/>
           <a:p>
             <a:pPr>
-              <a:defRPr sz="1600">
+              <a:defRPr sz="1800">
                 <a:solidFill>
                   <a:srgbClr val="787878"/>
                 </a:solidFill>
@@ -5723,8 +5867,8 @@
         </p:nvSpPr>
         <p:spPr>
           <a:xfrm>
-            <a:off x="5029200" y="2880360"/>
-            <a:ext cx="6675120" cy="457200"/>
+            <a:off x="5029200" y="2926080"/>
+            <a:ext cx="6675120" cy="548640"/>
           </a:xfrm>
           <a:prstGeom prst="rect">
             <a:avLst/>
@@ -5738,7 +5882,7 @@
           <a:lstStyle/>
           <a:p>
             <a:pPr>
-              <a:defRPr sz="2200" b="1">
+              <a:defRPr sz="2400" b="1">
                 <a:solidFill>
                   <a:srgbClr val="FF9650"/>
                 </a:solidFill>
@@ -5758,7 +5902,7 @@
         </p:nvSpPr>
         <p:spPr>
           <a:xfrm>
-            <a:off x="5212080" y="3383280"/>
+            <a:off x="5212080" y="3474720"/>
             <a:ext cx="6309360" cy="731520"/>
           </a:xfrm>
           <a:prstGeom prst="rect">
@@ -5773,7 +5917,7 @@
           <a:lstStyle/>
           <a:p>
             <a:pPr>
-              <a:defRPr sz="1600">
+              <a:defRPr sz="1800">
                 <a:solidFill>
                   <a:srgbClr val="787878"/>
                 </a:solidFill>
@@ -5836,8 +5980,8 @@
         </p:nvSpPr>
         <p:spPr>
           <a:xfrm>
-            <a:off x="2743200" y="4069080"/>
-            <a:ext cx="6675120" cy="457200"/>
+            <a:off x="2743200" y="4114800"/>
+            <a:ext cx="6675120" cy="548640"/>
           </a:xfrm>
           <a:prstGeom prst="rect">
             <a:avLst/>
@@ -5851,7 +5995,7 @@
           <a:lstStyle/>
           <a:p>
             <a:pPr>
-              <a:defRPr sz="2200" b="1">
+              <a:defRPr sz="2400" b="1">
                 <a:solidFill>
                   <a:srgbClr val="FF9650"/>
                 </a:solidFill>
@@ -5871,7 +6015,7 @@
         </p:nvSpPr>
         <p:spPr>
           <a:xfrm>
-            <a:off x="2926080" y="4572000"/>
+            <a:off x="2926080" y="4663440"/>
             <a:ext cx="6309360" cy="731520"/>
           </a:xfrm>
           <a:prstGeom prst="rect">
@@ -5886,7 +6030,7 @@
           <a:lstStyle/>
           <a:p>
             <a:pPr>
-              <a:defRPr sz="1600">
+              <a:defRPr sz="1800">
                 <a:solidFill>
                   <a:srgbClr val="787878"/>
                 </a:solidFill>
@@ -6181,7 +6325,7 @@
           <a:lstStyle/>
           <a:p>
             <a:pPr algn="ctr">
-              <a:defRPr sz="1800" b="1">
+              <a:defRPr sz="2000" b="1">
                 <a:solidFill>
                   <a:srgbClr val="FF9650"/>
                 </a:solidFill>
@@ -6202,7 +6346,7 @@
         <p:spPr>
           <a:xfrm>
             <a:off x="1371600" y="3291840"/>
-            <a:ext cx="3108960" cy="1188720"/>
+            <a:ext cx="3108960" cy="1371600"/>
           </a:xfrm>
           <a:prstGeom prst="rect">
             <a:avLst/>
@@ -6216,7 +6360,7 @@
           <a:lstStyle/>
           <a:p>
             <a:pPr algn="ctr">
-              <a:defRPr sz="1400">
+              <a:defRPr sz="1600">
                 <a:solidFill>
                   <a:srgbClr val="505050"/>
                 </a:solidFill>
@@ -6376,7 +6520,7 @@
           <a:lstStyle/>
           <a:p>
             <a:pPr algn="ctr">
-              <a:defRPr sz="1800" b="1">
+              <a:defRPr sz="2000" b="1">
                 <a:solidFill>
                   <a:srgbClr val="FFAA64"/>
                 </a:solidFill>
@@ -6397,7 +6541,7 @@
         <p:spPr>
           <a:xfrm>
             <a:off x="4663440" y="3291840"/>
-            <a:ext cx="3108960" cy="1188720"/>
+            <a:ext cx="3108960" cy="1371600"/>
           </a:xfrm>
           <a:prstGeom prst="rect">
             <a:avLst/>
@@ -6411,7 +6555,7 @@
           <a:lstStyle/>
           <a:p>
             <a:pPr algn="ctr">
-              <a:defRPr sz="1400">
+              <a:defRPr sz="1600">
                 <a:solidFill>
                   <a:srgbClr val="505050"/>
                 </a:solidFill>
@@ -6571,7 +6715,7 @@
           <a:lstStyle/>
           <a:p>
             <a:pPr algn="ctr">
-              <a:defRPr sz="1800" b="1">
+              <a:defRPr sz="2000" b="1">
                 <a:solidFill>
                   <a:srgbClr val="FF8246"/>
                 </a:solidFill>
@@ -6592,7 +6736,7 @@
         <p:spPr>
           <a:xfrm>
             <a:off x="7955279" y="3291840"/>
-            <a:ext cx="3108960" cy="1188720"/>
+            <a:ext cx="3108960" cy="1371600"/>
           </a:xfrm>
           <a:prstGeom prst="rect">
             <a:avLst/>
@@ -6606,7 +6750,7 @@
           <a:lstStyle/>
           <a:p>
             <a:pPr algn="ctr">
-              <a:defRPr sz="1400">
+              <a:defRPr sz="1600">
                 <a:solidFill>
                   <a:srgbClr val="505050"/>
                 </a:solidFill>
@@ -6645,7 +6789,7 @@
           <a:lstStyle/>
           <a:p>
             <a:pPr algn="ctr">
-              <a:defRPr sz="2200" b="1">
+              <a:defRPr sz="2400" b="1">
                 <a:solidFill>
                   <a:srgbClr val="FF9650"/>
                 </a:solidFill>
@@ -6905,7 +7049,7 @@
           <a:lstStyle/>
           <a:p>
             <a:pPr algn="ctr">
-              <a:defRPr sz="4000"/>
+              <a:defRPr sz="4400"/>
             </a:pPr>
             <a:r>
               <a:t>🎧</a:t>
@@ -6921,8 +7065,8 @@
         </p:nvSpPr>
         <p:spPr>
           <a:xfrm>
-            <a:off x="914400" y="2651760"/>
-            <a:ext cx="3200400" cy="457200"/>
+            <a:off x="914400" y="2743200"/>
+            <a:ext cx="3200400" cy="548640"/>
           </a:xfrm>
           <a:prstGeom prst="rect">
             <a:avLst/>
@@ -6936,7 +7080,7 @@
           <a:lstStyle/>
           <a:p>
             <a:pPr algn="ctr">
-              <a:defRPr sz="1900" b="1">
+              <a:defRPr sz="2100" b="1">
                 <a:solidFill>
                   <a:srgbClr val="5078B4"/>
                 </a:solidFill>
@@ -6956,8 +7100,8 @@
         </p:nvSpPr>
         <p:spPr>
           <a:xfrm>
-            <a:off x="1005840" y="3291840"/>
-            <a:ext cx="3017520" cy="1097280"/>
+            <a:off x="1005840" y="3474720"/>
+            <a:ext cx="3017520" cy="1371600"/>
           </a:xfrm>
           <a:prstGeom prst="rect">
             <a:avLst/>
@@ -6971,7 +7115,7 @@
           <a:lstStyle/>
           <a:p>
             <a:pPr algn="ctr">
-              <a:defRPr sz="1400">
+              <a:defRPr sz="1600">
                 <a:solidFill>
                   <a:srgbClr val="505050"/>
                 </a:solidFill>
@@ -7049,7 +7193,7 @@
           <a:lstStyle/>
           <a:p>
             <a:pPr algn="ctr">
-              <a:defRPr sz="4000"/>
+              <a:defRPr sz="4400"/>
             </a:pPr>
             <a:r>
               <a:t>📝</a:t>
@@ -7065,8 +7209,8 @@
         </p:nvSpPr>
         <p:spPr>
           <a:xfrm>
-            <a:off x="4572000" y="2651760"/>
-            <a:ext cx="3200400" cy="457200"/>
+            <a:off x="4572000" y="2743200"/>
+            <a:ext cx="3200400" cy="548640"/>
           </a:xfrm>
           <a:prstGeom prst="rect">
             <a:avLst/>
@@ -7080,7 +7224,7 @@
           <a:lstStyle/>
           <a:p>
             <a:pPr algn="ctr">
-              <a:defRPr sz="1900" b="1">
+              <a:defRPr sz="2100" b="1">
                 <a:solidFill>
                   <a:srgbClr val="5078B4"/>
                 </a:solidFill>
@@ -7100,8 +7244,8 @@
         </p:nvSpPr>
         <p:spPr>
           <a:xfrm>
-            <a:off x="4663440" y="3291840"/>
-            <a:ext cx="3017520" cy="1097280"/>
+            <a:off x="4663440" y="3474720"/>
+            <a:ext cx="3017520" cy="1371600"/>
           </a:xfrm>
           <a:prstGeom prst="rect">
             <a:avLst/>
@@ -7115,7 +7259,7 @@
           <a:lstStyle/>
           <a:p>
             <a:pPr algn="ctr">
-              <a:defRPr sz="1400">
+              <a:defRPr sz="1600">
                 <a:solidFill>
                   <a:srgbClr val="505050"/>
                 </a:solidFill>
@@ -7193,7 +7337,7 @@
           <a:lstStyle/>
           <a:p>
             <a:pPr algn="ctr">
-              <a:defRPr sz="4000"/>
+              <a:defRPr sz="4400"/>
             </a:pPr>
             <a:r>
               <a:t>📚</a:t>
@@ -7209,8 +7353,8 @@
         </p:nvSpPr>
         <p:spPr>
           <a:xfrm>
-            <a:off x="8229600" y="2651760"/>
-            <a:ext cx="3200400" cy="457200"/>
+            <a:off x="8229600" y="2743200"/>
+            <a:ext cx="3200400" cy="548640"/>
           </a:xfrm>
           <a:prstGeom prst="rect">
             <a:avLst/>
@@ -7224,7 +7368,7 @@
           <a:lstStyle/>
           <a:p>
             <a:pPr algn="ctr">
-              <a:defRPr sz="1900" b="1">
+              <a:defRPr sz="2100" b="1">
                 <a:solidFill>
                   <a:srgbClr val="5078B4"/>
                 </a:solidFill>
@@ -7244,8 +7388,8 @@
         </p:nvSpPr>
         <p:spPr>
           <a:xfrm>
-            <a:off x="8321040" y="3291840"/>
-            <a:ext cx="3017520" cy="1097280"/>
+            <a:off x="8321040" y="3474720"/>
+            <a:ext cx="3017520" cy="1371600"/>
           </a:xfrm>
           <a:prstGeom prst="rect">
             <a:avLst/>
@@ -7259,7 +7403,7 @@
           <a:lstStyle/>
           <a:p>
             <a:pPr algn="ctr">
-              <a:defRPr sz="1400">
+              <a:defRPr sz="1600">
                 <a:solidFill>
                   <a:srgbClr val="505050"/>
                 </a:solidFill>
@@ -7539,8 +7683,8 @@
         </p:nvSpPr>
         <p:spPr>
           <a:xfrm>
-            <a:off x="2468880" y="1737360"/>
-            <a:ext cx="7223760" cy="457200"/>
+            <a:off x="2468880" y="1828800"/>
+            <a:ext cx="7223760" cy="548640"/>
           </a:xfrm>
           <a:prstGeom prst="rect">
             <a:avLst/>
@@ -7554,7 +7698,7 @@
           <a:lstStyle/>
           <a:p>
             <a:pPr>
-              <a:defRPr sz="2000" b="1">
+              <a:defRPr sz="2200" b="1">
                 <a:solidFill>
                   <a:srgbClr val="5078B4"/>
                 </a:solidFill>
@@ -7574,7 +7718,7 @@
         </p:nvSpPr>
         <p:spPr>
           <a:xfrm>
-            <a:off x="2743200" y="2240280"/>
+            <a:off x="2743200" y="2377440"/>
             <a:ext cx="6675120" cy="548640"/>
           </a:xfrm>
           <a:prstGeom prst="rect">
@@ -7589,7 +7733,7 @@
           <a:lstStyle/>
           <a:p>
             <a:pPr>
-              <a:defRPr sz="1500">
+              <a:defRPr sz="1700">
                 <a:solidFill>
                   <a:srgbClr val="787878"/>
                 </a:solidFill>
@@ -7652,8 +7796,8 @@
         </p:nvSpPr>
         <p:spPr>
           <a:xfrm>
-            <a:off x="2468880" y="3017520"/>
-            <a:ext cx="7223760" cy="457200"/>
+            <a:off x="2468880" y="3108960"/>
+            <a:ext cx="7223760" cy="548640"/>
           </a:xfrm>
           <a:prstGeom prst="rect">
             <a:avLst/>
@@ -7667,7 +7811,7 @@
           <a:lstStyle/>
           <a:p>
             <a:pPr>
-              <a:defRPr sz="2000" b="1">
+              <a:defRPr sz="2200" b="1">
                 <a:solidFill>
                   <a:srgbClr val="5078B4"/>
                 </a:solidFill>
@@ -7687,7 +7831,7 @@
         </p:nvSpPr>
         <p:spPr>
           <a:xfrm>
-            <a:off x="2743200" y="3520440"/>
+            <a:off x="2743200" y="3657600"/>
             <a:ext cx="6675120" cy="548640"/>
           </a:xfrm>
           <a:prstGeom prst="rect">
@@ -7702,7 +7846,7 @@
           <a:lstStyle/>
           <a:p>
             <a:pPr>
-              <a:defRPr sz="1500">
+              <a:defRPr sz="1700">
                 <a:solidFill>
                   <a:srgbClr val="787878"/>
                 </a:solidFill>
@@ -7765,8 +7909,8 @@
         </p:nvSpPr>
         <p:spPr>
           <a:xfrm>
-            <a:off x="2468880" y="4297680"/>
-            <a:ext cx="7223760" cy="457200"/>
+            <a:off x="2468880" y="4389120"/>
+            <a:ext cx="7223760" cy="548640"/>
           </a:xfrm>
           <a:prstGeom prst="rect">
             <a:avLst/>
@@ -7780,7 +7924,7 @@
           <a:lstStyle/>
           <a:p>
             <a:pPr>
-              <a:defRPr sz="2000" b="1">
+              <a:defRPr sz="2200" b="1">
                 <a:solidFill>
                   <a:srgbClr val="5078B4"/>
                 </a:solidFill>
@@ -7800,7 +7944,7 @@
         </p:nvSpPr>
         <p:spPr>
           <a:xfrm>
-            <a:off x="2743200" y="4800600"/>
+            <a:off x="2743200" y="4937760"/>
             <a:ext cx="6675120" cy="548640"/>
           </a:xfrm>
           <a:prstGeom prst="rect">
@@ -7815,7 +7959,7 @@
           <a:lstStyle/>
           <a:p>
             <a:pPr>
-              <a:defRPr sz="1500">
+              <a:defRPr sz="1700">
                 <a:solidFill>
                   <a:srgbClr val="787878"/>
                 </a:solidFill>
@@ -8060,7 +8204,7 @@
         </p:nvSpPr>
         <p:spPr>
           <a:xfrm>
-            <a:off x="1188720" y="1737360"/>
+            <a:off x="1188720" y="1783080"/>
             <a:ext cx="914400" cy="548640"/>
           </a:xfrm>
           <a:prstGeom prst="rect">
@@ -8075,7 +8219,7 @@
           <a:lstStyle/>
           <a:p>
             <a:pPr>
-              <a:defRPr sz="2400" b="1">
+              <a:defRPr sz="2600" b="1">
                 <a:solidFill>
                   <a:srgbClr val="5078B4"/>
                 </a:solidFill>
@@ -8095,8 +8239,8 @@
         </p:nvSpPr>
         <p:spPr>
           <a:xfrm>
-            <a:off x="2011680" y="1828800"/>
-            <a:ext cx="3200400" cy="457200"/>
+            <a:off x="2011680" y="1874520"/>
+            <a:ext cx="3200400" cy="548640"/>
           </a:xfrm>
           <a:prstGeom prst="rect">
             <a:avLst/>
@@ -8110,7 +8254,7 @@
           <a:lstStyle/>
           <a:p>
             <a:pPr>
-              <a:defRPr sz="1800" b="1">
+              <a:defRPr sz="2000" b="1">
                 <a:solidFill>
                   <a:srgbClr val="5078B4"/>
                 </a:solidFill>
@@ -8130,7 +8274,7 @@
         </p:nvSpPr>
         <p:spPr>
           <a:xfrm>
-            <a:off x="2011680" y="2468880"/>
+            <a:off x="2011680" y="2560320"/>
             <a:ext cx="3200400" cy="822960"/>
           </a:xfrm>
           <a:prstGeom prst="rect">
@@ -8145,7 +8289,7 @@
           <a:lstStyle/>
           <a:p>
             <a:pPr>
-              <a:defRPr sz="1400">
+              <a:defRPr sz="1600">
                 <a:solidFill>
                   <a:srgbClr val="787878"/>
                 </a:solidFill>
@@ -8208,7 +8352,7 @@
         </p:nvSpPr>
         <p:spPr>
           <a:xfrm>
-            <a:off x="6949440" y="1737360"/>
+            <a:off x="6949440" y="1783080"/>
             <a:ext cx="914400" cy="548640"/>
           </a:xfrm>
           <a:prstGeom prst="rect">
@@ -8223,7 +8367,7 @@
           <a:lstStyle/>
           <a:p>
             <a:pPr>
-              <a:defRPr sz="2400" b="1">
+              <a:defRPr sz="2600" b="1">
                 <a:solidFill>
                   <a:srgbClr val="5078B4"/>
                 </a:solidFill>
@@ -8243,8 +8387,8 @@
         </p:nvSpPr>
         <p:spPr>
           <a:xfrm>
-            <a:off x="7772400" y="1828800"/>
-            <a:ext cx="3200400" cy="457200"/>
+            <a:off x="7772400" y="1874520"/>
+            <a:ext cx="3200400" cy="548640"/>
           </a:xfrm>
           <a:prstGeom prst="rect">
             <a:avLst/>
@@ -8258,7 +8402,7 @@
           <a:lstStyle/>
           <a:p>
             <a:pPr>
-              <a:defRPr sz="1800" b="1">
+              <a:defRPr sz="2000" b="1">
                 <a:solidFill>
                   <a:srgbClr val="5078B4"/>
                 </a:solidFill>
@@ -8278,7 +8422,7 @@
         </p:nvSpPr>
         <p:spPr>
           <a:xfrm>
-            <a:off x="7772400" y="2468880"/>
+            <a:off x="7772400" y="2560320"/>
             <a:ext cx="3200400" cy="822960"/>
           </a:xfrm>
           <a:prstGeom prst="rect">
@@ -8293,7 +8437,7 @@
           <a:lstStyle/>
           <a:p>
             <a:pPr>
-              <a:defRPr sz="1400">
+              <a:defRPr sz="1600">
                 <a:solidFill>
                   <a:srgbClr val="787878"/>
                 </a:solidFill>
@@ -8356,7 +8500,7 @@
         </p:nvSpPr>
         <p:spPr>
           <a:xfrm>
-            <a:off x="6949440" y="3749040"/>
+            <a:off x="6949440" y="3794760"/>
             <a:ext cx="914400" cy="548640"/>
           </a:xfrm>
           <a:prstGeom prst="rect">
@@ -8371,7 +8515,7 @@
           <a:lstStyle/>
           <a:p>
             <a:pPr>
-              <a:defRPr sz="2400" b="1">
+              <a:defRPr sz="2600" b="1">
                 <a:solidFill>
                   <a:srgbClr val="5078B4"/>
                 </a:solidFill>
@@ -8391,8 +8535,8 @@
         </p:nvSpPr>
         <p:spPr>
           <a:xfrm>
-            <a:off x="7772400" y="3840480"/>
-            <a:ext cx="3200400" cy="457200"/>
+            <a:off x="7772400" y="3886200"/>
+            <a:ext cx="3200400" cy="548640"/>
           </a:xfrm>
           <a:prstGeom prst="rect">
             <a:avLst/>
@@ -8406,7 +8550,7 @@
           <a:lstStyle/>
           <a:p>
             <a:pPr>
-              <a:defRPr sz="1800" b="1">
+              <a:defRPr sz="2000" b="1">
                 <a:solidFill>
                   <a:srgbClr val="5078B4"/>
                 </a:solidFill>
@@ -8426,7 +8570,7 @@
         </p:nvSpPr>
         <p:spPr>
           <a:xfrm>
-            <a:off x="7772400" y="4480560"/>
+            <a:off x="7772400" y="4572000"/>
             <a:ext cx="3200400" cy="822960"/>
           </a:xfrm>
           <a:prstGeom prst="rect">
@@ -8441,7 +8585,7 @@
           <a:lstStyle/>
           <a:p>
             <a:pPr>
-              <a:defRPr sz="1400">
+              <a:defRPr sz="1600">
                 <a:solidFill>
                   <a:srgbClr val="787878"/>
                 </a:solidFill>
@@ -8504,7 +8648,7 @@
         </p:nvSpPr>
         <p:spPr>
           <a:xfrm>
-            <a:off x="1188720" y="3749040"/>
+            <a:off x="1188720" y="3794760"/>
             <a:ext cx="914400" cy="548640"/>
           </a:xfrm>
           <a:prstGeom prst="rect">
@@ -8519,7 +8663,7 @@
           <a:lstStyle/>
           <a:p>
             <a:pPr>
-              <a:defRPr sz="2400" b="1">
+              <a:defRPr sz="2600" b="1">
                 <a:solidFill>
                   <a:srgbClr val="5078B4"/>
                 </a:solidFill>
@@ -8539,8 +8683,8 @@
         </p:nvSpPr>
         <p:spPr>
           <a:xfrm>
-            <a:off x="2011680" y="3840480"/>
-            <a:ext cx="3200400" cy="457200"/>
+            <a:off x="2011680" y="3886200"/>
+            <a:ext cx="3200400" cy="548640"/>
           </a:xfrm>
           <a:prstGeom prst="rect">
             <a:avLst/>
@@ -8554,7 +8698,7 @@
           <a:lstStyle/>
           <a:p>
             <a:pPr>
-              <a:defRPr sz="1800" b="1">
+              <a:defRPr sz="2000" b="1">
                 <a:solidFill>
                   <a:srgbClr val="5078B4"/>
                 </a:solidFill>
@@ -8574,7 +8718,7 @@
         </p:nvSpPr>
         <p:spPr>
           <a:xfrm>
-            <a:off x="2011680" y="4480560"/>
+            <a:off x="2011680" y="4572000"/>
             <a:ext cx="3200400" cy="822960"/>
           </a:xfrm>
           <a:prstGeom prst="rect">
@@ -8589,7 +8733,7 @@
           <a:lstStyle/>
           <a:p>
             <a:pPr>
-              <a:defRPr sz="1400">
+              <a:defRPr sz="1600">
                 <a:solidFill>
                   <a:srgbClr val="787878"/>
                 </a:solidFill>
@@ -8624,7 +8768,7 @@
           <a:lstStyle/>
           <a:p>
             <a:pPr algn="ctr">
-              <a:defRPr sz="1800" b="1">
+              <a:defRPr sz="2000" b="1">
                 <a:solidFill>
                   <a:srgbClr val="5078B4"/>
                 </a:solidFill>
@@ -8869,8 +9013,8 @@
         </p:nvSpPr>
         <p:spPr>
           <a:xfrm>
-            <a:off x="914400" y="1417320"/>
-            <a:ext cx="4389120" cy="548640"/>
+            <a:off x="914400" y="1463040"/>
+            <a:ext cx="4389120" cy="640080"/>
           </a:xfrm>
           <a:prstGeom prst="rect">
             <a:avLst/>
@@ -8884,7 +9028,7 @@
           <a:lstStyle/>
           <a:p>
             <a:pPr algn="ctr">
-              <a:defRPr sz="2600" b="1">
+              <a:defRPr sz="2800" b="1">
                 <a:solidFill>
                   <a:srgbClr val="FF9650"/>
                 </a:solidFill>
@@ -8904,8 +9048,8 @@
         </p:nvSpPr>
         <p:spPr>
           <a:xfrm>
-            <a:off x="1097280" y="2011680"/>
-            <a:ext cx="4023360" cy="1828800"/>
+            <a:off x="1097280" y="2194560"/>
+            <a:ext cx="4023360" cy="2011680"/>
           </a:xfrm>
           <a:prstGeom prst="rect">
             <a:avLst/>
@@ -8919,7 +9063,7 @@
           <a:lstStyle/>
           <a:p>
             <a:pPr algn="ctr">
-              <a:defRPr sz="1600">
+              <a:defRPr sz="1800">
                 <a:solidFill>
                   <a:srgbClr val="505050"/>
                 </a:solidFill>
@@ -8990,8 +9134,8 @@
         </p:nvSpPr>
         <p:spPr>
           <a:xfrm>
-            <a:off x="6858000" y="1417320"/>
-            <a:ext cx="4389120" cy="548640"/>
+            <a:off x="6858000" y="1463040"/>
+            <a:ext cx="4389120" cy="640080"/>
           </a:xfrm>
           <a:prstGeom prst="rect">
             <a:avLst/>
@@ -9005,7 +9149,7 @@
           <a:lstStyle/>
           <a:p>
             <a:pPr algn="ctr">
-              <a:defRPr sz="2600" b="1">
+              <a:defRPr sz="2800" b="1">
                 <a:solidFill>
                   <a:srgbClr val="5078B4"/>
                 </a:solidFill>
@@ -9025,8 +9169,8 @@
         </p:nvSpPr>
         <p:spPr>
           <a:xfrm>
-            <a:off x="7040880" y="2011680"/>
-            <a:ext cx="4023360" cy="1828800"/>
+            <a:off x="7040880" y="2194560"/>
+            <a:ext cx="4023360" cy="2011680"/>
           </a:xfrm>
           <a:prstGeom prst="rect">
             <a:avLst/>
@@ -9040,7 +9184,7 @@
           <a:lstStyle/>
           <a:p>
             <a:pPr algn="ctr">
-              <a:defRPr sz="1600">
+              <a:defRPr sz="1800">
                 <a:solidFill>
                   <a:srgbClr val="505050"/>
                 </a:solidFill>
@@ -9083,7 +9227,7 @@
           <a:lstStyle/>
           <a:p>
             <a:pPr algn="ctr">
-              <a:defRPr sz="1800" b="1">
+              <a:defRPr sz="2000" b="1">
                 <a:solidFill>
                   <a:srgbClr val="FF9650"/>
                 </a:solidFill>
@@ -9118,7 +9262,7 @@
           <a:lstStyle/>
           <a:p>
             <a:pPr algn="ctr">
-              <a:defRPr sz="1800">
+              <a:defRPr sz="2000">
                 <a:solidFill>
                   <a:srgbClr val="505050"/>
                 </a:solidFill>
